--- a/curriculum/M01/W04/L03/slides.pptx
+++ b/curriculum/M01/W04/L03/slides.pptx
@@ -5439,7 +5439,36 @@
                 <a:ea typeface="Malgun Gothic"/>
                 <a:cs typeface="Malgun Gothic"/>
               </a:rPr>
-              <a:t>: 제1분열에서 각 상동 염색체 쌍이 어느 쪽으로 갈지가 쌍마다 독립적으로 정해진다. 사람의 23쌍에서 2의 23제곱, 약 840만 가지 조합이 나온다. 2. </a:t>
+              <a:t>: 제1분열에서 각 상동 염색체 쌍이 어느 쪽으로 갈지가 쌍마다 독립적으로 정해진다. 사람의 23쌍에서 2의 23제곱, 약 840만 가지 조합이 나온다.</a:t>
+            </a:r>
+          </a:p>
+          <a:p>
+            <a:pPr>
+              <a:spcAft>
+                <a:spcPts val="900"/>
+              </a:spcAft>
+            </a:pPr>
+            <a:r>
+              <a:rPr sz="1800" b="1" i="0">
+                <a:solidFill>
+                  <a:srgbClr val="F2B705"/>
+                </a:solidFill>
+                <a:latin typeface="Malgun Gothic"/>
+                <a:ea typeface="Malgun Gothic"/>
+                <a:cs typeface="Malgun Gothic"/>
+              </a:rPr>
+              <a:t>•  </a:t>
+            </a:r>
+            <a:r>
+              <a:rPr sz="1800" b="0" i="0">
+                <a:solidFill>
+                  <a:srgbClr val="11202B"/>
+                </a:solidFill>
+                <a:latin typeface="Malgun Gothic"/>
+                <a:ea typeface="Malgun Gothic"/>
+                <a:cs typeface="Malgun Gothic"/>
+              </a:rPr>
+              <a:t>2. </a:t>
             </a:r>
             <a:r>
               <a:rPr sz="1800" b="1" i="0">

--- a/curriculum/M01/W04/L03/slides.pptx
+++ b/curriculum/M01/W04/L03/slides.pptx
@@ -12461,7 +12461,7 @@
                 <a:ea typeface="Malgun Gothic"/>
                 <a:cs typeface="Malgun Gothic"/>
               </a:rPr>
-              <a:t>M01-W02-L03 생식계 요약 — 감수분열, 염색체 비분리, 부모 연령의 효과</a:t>
+              <a:t>M01-W02-L03 생식계 요약: 생식기관·생식세포·호르몬 — 감수분열, 염색체 비분리, 부모 연령의 효과</a:t>
             </a:r>
           </a:p>
           <a:p>
@@ -12490,7 +12490,7 @@
                 <a:ea typeface="Malgun Gothic"/>
                 <a:cs typeface="Malgun Gothic"/>
               </a:rPr>
-              <a:t>M01-W03-L01 발생 요약 — 유전자 발현과 세포 운명</a:t>
+              <a:t>M01-W03-L01 발생 요약: 수정·배엽·기관 형성 — 유전자 발현과 세포 운명</a:t>
             </a:r>
           </a:p>
           <a:p>
@@ -12519,7 +12519,7 @@
                 <a:ea typeface="Malgun Gothic"/>
                 <a:cs typeface="Malgun Gothic"/>
               </a:rPr>
-              <a:t>M01-W05-L03 유전정보의 흐름 — 복제, 전사, 번역의 개요</a:t>
+              <a:t>M01-W05-L03 유전정보의 흐름: 복제·전사·번역 — 복제, 전사, 번역의 개요</a:t>
             </a:r>
           </a:p>
         </p:txBody>

--- a/curriculum/M01/W04/L03/slides.pptx
+++ b/curriculum/M01/W04/L03/slides.pptx
@@ -4037,7 +4037,7 @@
               </a:spcAft>
             </a:pPr>
             <a:r>
-              <a:rPr sz="1800" b="1" i="0">
+              <a:rPr sz="1600" b="1" i="0">
                 <a:solidFill>
                   <a:srgbClr val="F2B705"/>
                 </a:solidFill>
@@ -4048,15 +4048,59 @@
               <a:t>•  </a:t>
             </a:r>
             <a:r>
-              <a:rPr sz="1800" b="0" i="0">
-                <a:solidFill>
-                  <a:srgbClr val="11202B"/>
-                </a:solidFill>
-                <a:latin typeface="Malgun Gothic"/>
-                <a:ea typeface="Malgun Gothic"/>
-                <a:cs typeface="Malgun Gothic"/>
-              </a:rPr>
-              <a:t>유전의 규칙은 염색체의 행동에서 나온다. 두 분열을 비교하는 것이 출발점이다.</a:t>
+              <a:rPr sz="1600" b="0" i="0">
+                <a:solidFill>
+                  <a:srgbClr val="11202B"/>
+                </a:solidFill>
+                <a:latin typeface="Malgun Gothic"/>
+                <a:ea typeface="Malgun Gothic"/>
+                <a:cs typeface="Malgun Gothic"/>
+              </a:rPr>
+              <a:t>여기까지는 유전자가 무엇이고 무엇을 하는지였다. 이제 두 번째 질문, </a:t>
+            </a:r>
+            <a:r>
+              <a:rPr sz="1600" b="1" i="0">
+                <a:solidFill>
+                  <a:srgbClr val="11202B"/>
+                </a:solidFill>
+                <a:latin typeface="Malgun Gothic"/>
+                <a:ea typeface="Malgun Gothic"/>
+                <a:cs typeface="Malgun Gothic"/>
+              </a:rPr>
+              <a:t>어떤 규칙으로 전해지는가</a:t>
+            </a:r>
+            <a:r>
+              <a:rPr sz="1600" b="0" i="0">
+                <a:solidFill>
+                  <a:srgbClr val="11202B"/>
+                </a:solidFill>
+                <a:latin typeface="Malgun Gothic"/>
+                <a:ea typeface="Malgun Gothic"/>
+                <a:cs typeface="Malgun Gothic"/>
+              </a:rPr>
+              <a:t>로 넘어간다. 그런데 그 규칙은 추상적인 법칙이 아니라 </a:t>
+            </a:r>
+            <a:r>
+              <a:rPr sz="1600" b="1" i="0">
+                <a:solidFill>
+                  <a:srgbClr val="11202B"/>
+                </a:solidFill>
+                <a:latin typeface="Malgun Gothic"/>
+                <a:ea typeface="Malgun Gothic"/>
+                <a:cs typeface="Malgun Gothic"/>
+              </a:rPr>
+              <a:t>염색체가 분열 때 실제로 어떻게 움직이는가</a:t>
+            </a:r>
+            <a:r>
+              <a:rPr sz="1600" b="0" i="0">
+                <a:solidFill>
+                  <a:srgbClr val="11202B"/>
+                </a:solidFill>
+                <a:latin typeface="Malgun Gothic"/>
+                <a:ea typeface="Malgun Gothic"/>
+                <a:cs typeface="Malgun Gothic"/>
+              </a:rPr>
+              <a:t>에서 그대로 따라 나온다. 그래서 규칙을 보기 전에 분열부터 본다.</a:t>
             </a:r>
           </a:p>
           <a:p>
@@ -4066,7 +4110,7 @@
               </a:spcAft>
             </a:pPr>
             <a:r>
-              <a:rPr sz="1800" b="1" i="0">
+              <a:rPr sz="1600" b="1" i="0">
                 <a:solidFill>
                   <a:srgbClr val="F2B705"/>
                 </a:solidFill>
@@ -4077,48 +4121,15 @@
               <a:t>•  </a:t>
             </a:r>
             <a:r>
-              <a:rPr sz="1800" b="1" i="0">
-                <a:solidFill>
-                  <a:srgbClr val="11202B"/>
-                </a:solidFill>
-                <a:latin typeface="Malgun Gothic"/>
-                <a:ea typeface="Malgun Gothic"/>
-                <a:cs typeface="Malgun Gothic"/>
-              </a:rPr>
-              <a:t>유사분열(mitosis).</a:t>
-            </a:r>
-            <a:r>
-              <a:rPr sz="1800" b="0" i="0">
-                <a:solidFill>
-                  <a:srgbClr val="11202B"/>
-                </a:solidFill>
-                <a:latin typeface="Malgun Gothic"/>
-                <a:ea typeface="Malgun Gothic"/>
-                <a:cs typeface="Malgun Gothic"/>
-              </a:rPr>
-              <a:t> 체세포가 분열해 </a:t>
-            </a:r>
-            <a:r>
-              <a:rPr sz="1800" b="1" i="0">
-                <a:solidFill>
-                  <a:srgbClr val="11202B"/>
-                </a:solidFill>
-                <a:latin typeface="Malgun Gothic"/>
-                <a:ea typeface="Malgun Gothic"/>
-                <a:cs typeface="Malgun Gothic"/>
-              </a:rPr>
-              <a:t>유전적으로 동일한 두 세포</a:t>
-            </a:r>
-            <a:r>
-              <a:rPr sz="1800" b="0" i="0">
-                <a:solidFill>
-                  <a:srgbClr val="11202B"/>
-                </a:solidFill>
-                <a:latin typeface="Malgun Gothic"/>
-                <a:ea typeface="Malgun Gothic"/>
-                <a:cs typeface="Malgun Gothic"/>
-              </a:rPr>
-              <a:t>를 만든다. 복제된 염색체가 중기판에 한 줄로 늘어서고 자매 염색분체가 갈라진다. 염색체 수는 유지된다(2n → 2n).</a:t>
+              <a:rPr sz="1600" b="0" i="0">
+                <a:solidFill>
+                  <a:srgbClr val="11202B"/>
+                </a:solidFill>
+                <a:latin typeface="Malgun Gothic"/>
+                <a:ea typeface="Malgun Gothic"/>
+                <a:cs typeface="Malgun Gothic"/>
+              </a:rPr>
+              <a:t>유전의 규칙은 염색체의 행동에서 나온다. 두 분열을 비교하는 것이 출발점이다.</a:t>
             </a:r>
           </a:p>
           <a:p>
@@ -4128,7 +4139,7 @@
               </a:spcAft>
             </a:pPr>
             <a:r>
-              <a:rPr sz="1800" b="1" i="0">
+              <a:rPr sz="1600" b="1" i="0">
                 <a:solidFill>
                   <a:srgbClr val="F2B705"/>
                 </a:solidFill>
@@ -4139,48 +4150,48 @@
               <a:t>•  </a:t>
             </a:r>
             <a:r>
-              <a:rPr sz="1800" b="1" i="0">
-                <a:solidFill>
-                  <a:srgbClr val="11202B"/>
-                </a:solidFill>
-                <a:latin typeface="Malgun Gothic"/>
-                <a:ea typeface="Malgun Gothic"/>
-                <a:cs typeface="Malgun Gothic"/>
-              </a:rPr>
-              <a:t>감수분열(meiosis).</a:t>
-            </a:r>
-            <a:r>
-              <a:rPr sz="1800" b="0" i="0">
-                <a:solidFill>
-                  <a:srgbClr val="11202B"/>
-                </a:solidFill>
-                <a:latin typeface="Malgun Gothic"/>
-                <a:ea typeface="Malgun Gothic"/>
-                <a:cs typeface="Malgun Gothic"/>
-              </a:rPr>
-              <a:t> 생식세포를 만든다. </a:t>
-            </a:r>
-            <a:r>
-              <a:rPr sz="1800" b="1" i="0">
-                <a:solidFill>
-                  <a:srgbClr val="11202B"/>
-                </a:solidFill>
-                <a:latin typeface="Malgun Gothic"/>
-                <a:ea typeface="Malgun Gothic"/>
-                <a:cs typeface="Malgun Gothic"/>
-              </a:rPr>
-              <a:t>한 번의 복제 뒤 두 번의 분열</a:t>
-            </a:r>
-            <a:r>
-              <a:rPr sz="1800" b="0" i="0">
-                <a:solidFill>
-                  <a:srgbClr val="11202B"/>
-                </a:solidFill>
-                <a:latin typeface="Malgun Gothic"/>
-                <a:ea typeface="Malgun Gothic"/>
-                <a:cs typeface="Malgun Gothic"/>
-              </a:rPr>
-              <a:t>이 일어나 염색체 수가 절반이 된다(2n → n). 두 분열의 성격이 다르다.</a:t>
+              <a:rPr sz="1600" b="1" i="0">
+                <a:solidFill>
+                  <a:srgbClr val="11202B"/>
+                </a:solidFill>
+                <a:latin typeface="Malgun Gothic"/>
+                <a:ea typeface="Malgun Gothic"/>
+                <a:cs typeface="Malgun Gothic"/>
+              </a:rPr>
+              <a:t>유사분열(mitosis).</a:t>
+            </a:r>
+            <a:r>
+              <a:rPr sz="1600" b="0" i="0">
+                <a:solidFill>
+                  <a:srgbClr val="11202B"/>
+                </a:solidFill>
+                <a:latin typeface="Malgun Gothic"/>
+                <a:ea typeface="Malgun Gothic"/>
+                <a:cs typeface="Malgun Gothic"/>
+              </a:rPr>
+              <a:t> 체세포가 분열해 </a:t>
+            </a:r>
+            <a:r>
+              <a:rPr sz="1600" b="1" i="0">
+                <a:solidFill>
+                  <a:srgbClr val="11202B"/>
+                </a:solidFill>
+                <a:latin typeface="Malgun Gothic"/>
+                <a:ea typeface="Malgun Gothic"/>
+                <a:cs typeface="Malgun Gothic"/>
+              </a:rPr>
+              <a:t>유전적으로 동일한 두 세포</a:t>
+            </a:r>
+            <a:r>
+              <a:rPr sz="1600" b="0" i="0">
+                <a:solidFill>
+                  <a:srgbClr val="11202B"/>
+                </a:solidFill>
+                <a:latin typeface="Malgun Gothic"/>
+                <a:ea typeface="Malgun Gothic"/>
+                <a:cs typeface="Malgun Gothic"/>
+              </a:rPr>
+              <a:t>를 만든다. 복제된 염색체가 중기판에 한 줄로 늘어서고 자매 염색분체가 갈라진다. 염색체 수는 유지된다(2n → 2n).</a:t>
             </a:r>
           </a:p>
           <a:p>
@@ -4190,7 +4201,7 @@
               </a:spcAft>
             </a:pPr>
             <a:r>
-              <a:rPr sz="1800" b="1" i="0">
+              <a:rPr sz="1600" b="1" i="0">
                 <a:solidFill>
                   <a:srgbClr val="F2B705"/>
                 </a:solidFill>
@@ -4201,70 +4212,48 @@
               <a:t>•  </a:t>
             </a:r>
             <a:r>
-              <a:rPr sz="1800" b="1" i="0">
-                <a:solidFill>
-                  <a:srgbClr val="11202B"/>
-                </a:solidFill>
-                <a:latin typeface="Malgun Gothic"/>
-                <a:ea typeface="Malgun Gothic"/>
-                <a:cs typeface="Malgun Gothic"/>
-              </a:rPr>
-              <a:t>제1감수분열</a:t>
-            </a:r>
-            <a:r>
-              <a:rPr sz="1800" b="0" i="0">
-                <a:solidFill>
-                  <a:srgbClr val="11202B"/>
-                </a:solidFill>
-                <a:latin typeface="Malgun Gothic"/>
-                <a:ea typeface="Malgun Gothic"/>
-                <a:cs typeface="Malgun Gothic"/>
-              </a:rPr>
-              <a:t>: </a:t>
-            </a:r>
-            <a:r>
-              <a:rPr sz="1800" b="1" i="0">
-                <a:solidFill>
-                  <a:srgbClr val="11202B"/>
-                </a:solidFill>
-                <a:latin typeface="Malgun Gothic"/>
-                <a:ea typeface="Malgun Gothic"/>
-                <a:cs typeface="Malgun Gothic"/>
-              </a:rPr>
-              <a:t>상동 염색체</a:t>
-            </a:r>
-            <a:r>
-              <a:rPr sz="1800" b="0" i="0">
-                <a:solidFill>
-                  <a:srgbClr val="11202B"/>
-                </a:solidFill>
-                <a:latin typeface="Malgun Gothic"/>
-                <a:ea typeface="Malgun Gothic"/>
-                <a:cs typeface="Malgun Gothic"/>
-              </a:rPr>
-              <a:t>가 짝을 지어 늘어섰다가 갈라진다. 염색체 수가 절반이 되는 것은 이 단계다. 짝을 짓는 동안 </a:t>
-            </a:r>
-            <a:r>
-              <a:rPr sz="1800" b="1" i="0">
-                <a:solidFill>
-                  <a:srgbClr val="11202B"/>
-                </a:solidFill>
-                <a:latin typeface="Malgun Gothic"/>
-                <a:ea typeface="Malgun Gothic"/>
-                <a:cs typeface="Malgun Gothic"/>
-              </a:rPr>
-              <a:t>교차</a:t>
-            </a:r>
-            <a:r>
-              <a:rPr sz="1800" b="0" i="0">
-                <a:solidFill>
-                  <a:srgbClr val="11202B"/>
-                </a:solidFill>
-                <a:latin typeface="Malgun Gothic"/>
-                <a:ea typeface="Malgun Gothic"/>
-                <a:cs typeface="Malgun Gothic"/>
-              </a:rPr>
-              <a:t>가 일어난다.</a:t>
+              <a:rPr sz="1600" b="1" i="0">
+                <a:solidFill>
+                  <a:srgbClr val="11202B"/>
+                </a:solidFill>
+                <a:latin typeface="Malgun Gothic"/>
+                <a:ea typeface="Malgun Gothic"/>
+                <a:cs typeface="Malgun Gothic"/>
+              </a:rPr>
+              <a:t>감수분열(meiosis).</a:t>
+            </a:r>
+            <a:r>
+              <a:rPr sz="1600" b="0" i="0">
+                <a:solidFill>
+                  <a:srgbClr val="11202B"/>
+                </a:solidFill>
+                <a:latin typeface="Malgun Gothic"/>
+                <a:ea typeface="Malgun Gothic"/>
+                <a:cs typeface="Malgun Gothic"/>
+              </a:rPr>
+              <a:t> 생식세포를 만든다. </a:t>
+            </a:r>
+            <a:r>
+              <a:rPr sz="1600" b="1" i="0">
+                <a:solidFill>
+                  <a:srgbClr val="11202B"/>
+                </a:solidFill>
+                <a:latin typeface="Malgun Gothic"/>
+                <a:ea typeface="Malgun Gothic"/>
+                <a:cs typeface="Malgun Gothic"/>
+              </a:rPr>
+              <a:t>한 번의 복제 뒤 두 번의 분열</a:t>
+            </a:r>
+            <a:r>
+              <a:rPr sz="1600" b="0" i="0">
+                <a:solidFill>
+                  <a:srgbClr val="11202B"/>
+                </a:solidFill>
+                <a:latin typeface="Malgun Gothic"/>
+                <a:ea typeface="Malgun Gothic"/>
+                <a:cs typeface="Malgun Gothic"/>
+              </a:rPr>
+              <a:t>이 일어나 염색체 수가 절반이 된다(2n → n). 두 분열의 성격이 다르다.</a:t>
             </a:r>
           </a:p>
           <a:p>
@@ -4274,7 +4263,7 @@
               </a:spcAft>
             </a:pPr>
             <a:r>
-              <a:rPr sz="1800" b="1" i="0">
+              <a:rPr sz="1600" b="1" i="0">
                 <a:solidFill>
                   <a:srgbClr val="F2B705"/>
                 </a:solidFill>
@@ -4285,7 +4274,91 @@
               <a:t>•  </a:t>
             </a:r>
             <a:r>
-              <a:rPr sz="1800" b="1" i="0">
+              <a:rPr sz="1600" b="1" i="0">
+                <a:solidFill>
+                  <a:srgbClr val="11202B"/>
+                </a:solidFill>
+                <a:latin typeface="Malgun Gothic"/>
+                <a:ea typeface="Malgun Gothic"/>
+                <a:cs typeface="Malgun Gothic"/>
+              </a:rPr>
+              <a:t>제1감수분열</a:t>
+            </a:r>
+            <a:r>
+              <a:rPr sz="1600" b="0" i="0">
+                <a:solidFill>
+                  <a:srgbClr val="11202B"/>
+                </a:solidFill>
+                <a:latin typeface="Malgun Gothic"/>
+                <a:ea typeface="Malgun Gothic"/>
+                <a:cs typeface="Malgun Gothic"/>
+              </a:rPr>
+              <a:t>: </a:t>
+            </a:r>
+            <a:r>
+              <a:rPr sz="1600" b="1" i="0">
+                <a:solidFill>
+                  <a:srgbClr val="11202B"/>
+                </a:solidFill>
+                <a:latin typeface="Malgun Gothic"/>
+                <a:ea typeface="Malgun Gothic"/>
+                <a:cs typeface="Malgun Gothic"/>
+              </a:rPr>
+              <a:t>상동 염색체</a:t>
+            </a:r>
+            <a:r>
+              <a:rPr sz="1600" b="0" i="0">
+                <a:solidFill>
+                  <a:srgbClr val="11202B"/>
+                </a:solidFill>
+                <a:latin typeface="Malgun Gothic"/>
+                <a:ea typeface="Malgun Gothic"/>
+                <a:cs typeface="Malgun Gothic"/>
+              </a:rPr>
+              <a:t>가 짝을 지어 늘어섰다가 갈라진다. 염색체 수가 절반이 되는 것은 이 단계다. 짝을 짓는 동안 </a:t>
+            </a:r>
+            <a:r>
+              <a:rPr sz="1600" b="1" i="0">
+                <a:solidFill>
+                  <a:srgbClr val="11202B"/>
+                </a:solidFill>
+                <a:latin typeface="Malgun Gothic"/>
+                <a:ea typeface="Malgun Gothic"/>
+                <a:cs typeface="Malgun Gothic"/>
+              </a:rPr>
+              <a:t>교차</a:t>
+            </a:r>
+            <a:r>
+              <a:rPr sz="1600" b="0" i="0">
+                <a:solidFill>
+                  <a:srgbClr val="11202B"/>
+                </a:solidFill>
+                <a:latin typeface="Malgun Gothic"/>
+                <a:ea typeface="Malgun Gothic"/>
+                <a:cs typeface="Malgun Gothic"/>
+              </a:rPr>
+              <a:t>가 일어난다.</a:t>
+            </a:r>
+          </a:p>
+          <a:p>
+            <a:pPr>
+              <a:spcAft>
+                <a:spcPts val="900"/>
+              </a:spcAft>
+            </a:pPr>
+            <a:r>
+              <a:rPr sz="1600" b="1" i="0">
+                <a:solidFill>
+                  <a:srgbClr val="F2B705"/>
+                </a:solidFill>
+                <a:latin typeface="Malgun Gothic"/>
+                <a:ea typeface="Malgun Gothic"/>
+                <a:cs typeface="Malgun Gothic"/>
+              </a:rPr>
+              <a:t>•  </a:t>
+            </a:r>
+            <a:r>
+              <a:rPr sz="1600" b="1" i="0">
                 <a:solidFill>
                   <a:srgbClr val="11202B"/>
                 </a:solidFill>
@@ -4296,7 +4369,7 @@
               <a:t>제2감수분열</a:t>
             </a:r>
             <a:r>
-              <a:rPr sz="1800" b="0" i="0">
+              <a:rPr sz="1600" b="0" i="0">
                 <a:solidFill>
                   <a:srgbClr val="11202B"/>
                 </a:solidFill>
@@ -6120,6 +6193,57 @@
                 <a:ea typeface="Malgun Gothic"/>
                 <a:cs typeface="Malgun Gothic"/>
               </a:rPr>
+              <a:t>앞 절에서 감수분열 때 염색체가 어떻게 갈라지는지를 보았다. 멘델은 그 과정을 전혀 모른 채 완두콩의 교배 결과만으로 두 규칙을 찾아냈다. 뒤에 염색체의 행동이 밝혀졌을 때 </a:t>
+            </a:r>
+            <a:r>
+              <a:rPr sz="1400" b="1" i="0">
+                <a:solidFill>
+                  <a:srgbClr val="11202B"/>
+                </a:solidFill>
+                <a:latin typeface="Malgun Gothic"/>
+                <a:ea typeface="Malgun Gothic"/>
+                <a:cs typeface="Malgun Gothic"/>
+              </a:rPr>
+              <a:t>두 규칙이 그 행동의 직접적 결과임이 드러났다.</a:t>
+            </a:r>
+            <a:r>
+              <a:rPr sz="1400" b="0" i="0">
+                <a:solidFill>
+                  <a:srgbClr val="11202B"/>
+                </a:solidFill>
+                <a:latin typeface="Malgun Gothic"/>
+                <a:ea typeface="Malgun Gothic"/>
+                <a:cs typeface="Malgun Gothic"/>
+              </a:rPr>
+              <a:t> 이 일치가 유전학에서 가장 중요한 연결 가운데 하나다.</a:t>
+            </a:r>
+          </a:p>
+          <a:p>
+            <a:pPr>
+              <a:spcAft>
+                <a:spcPts val="900"/>
+              </a:spcAft>
+            </a:pPr>
+            <a:r>
+              <a:rPr sz="1400" b="1" i="0">
+                <a:solidFill>
+                  <a:srgbClr val="F2B705"/>
+                </a:solidFill>
+                <a:latin typeface="Malgun Gothic"/>
+                <a:ea typeface="Malgun Gothic"/>
+                <a:cs typeface="Malgun Gothic"/>
+              </a:rPr>
+              <a:t>•  </a:t>
+            </a:r>
+            <a:r>
+              <a:rPr sz="1400" b="0" i="0">
+                <a:solidFill>
+                  <a:srgbClr val="11202B"/>
+                </a:solidFill>
+                <a:latin typeface="Malgun Gothic"/>
+                <a:ea typeface="Malgun Gothic"/>
+                <a:cs typeface="Malgun Gothic"/>
+              </a:rPr>
               <a:t>멘델은 완두콩 교배에서 두 규칙을 찾았다. 중요한 점은 이 규칙들이 </a:t>
             </a:r>
             <a:r>
@@ -6766,6 +6890,57 @@
                 <a:ea typeface="Malgun Gothic"/>
                 <a:cs typeface="Malgun Gothic"/>
               </a:rPr>
+              <a:t>앞 절의 규칙에서 우성과 열성이라는 말을 썼다. 그런데 이 말은 흔히 잘못 이해된다. "우성 유전자가 더 강하다"는 설명이 그것인데, 이 설명으로는 설명되지 않는 현상이 많다. 이 절은 그 말을 </a:t>
+            </a:r>
+            <a:r>
+              <a:rPr sz="1400" b="1" i="0">
+                <a:solidFill>
+                  <a:srgbClr val="11202B"/>
+                </a:solidFill>
+                <a:latin typeface="Malgun Gothic"/>
+                <a:ea typeface="Malgun Gothic"/>
+                <a:cs typeface="Malgun Gothic"/>
+              </a:rPr>
+              <a:t>유전자의 성질이 아니라 관찰 수준에 따라 달라지는 관계</a:t>
+            </a:r>
+            <a:r>
+              <a:rPr sz="1400" b="0" i="0">
+                <a:solidFill>
+                  <a:srgbClr val="11202B"/>
+                </a:solidFill>
+                <a:latin typeface="Malgun Gothic"/>
+                <a:ea typeface="Malgun Gothic"/>
+                <a:cs typeface="Malgun Gothic"/>
+              </a:rPr>
+              <a:t>로 바로 세운다.</a:t>
+            </a:r>
+          </a:p>
+          <a:p>
+            <a:pPr>
+              <a:spcAft>
+                <a:spcPts val="900"/>
+              </a:spcAft>
+            </a:pPr>
+            <a:r>
+              <a:rPr sz="1400" b="1" i="0">
+                <a:solidFill>
+                  <a:srgbClr val="F2B705"/>
+                </a:solidFill>
+                <a:latin typeface="Malgun Gothic"/>
+                <a:ea typeface="Malgun Gothic"/>
+                <a:cs typeface="Malgun Gothic"/>
+              </a:rPr>
+              <a:t>•  </a:t>
+            </a:r>
+            <a:r>
+              <a:rPr sz="1400" b="0" i="0">
+                <a:solidFill>
+                  <a:srgbClr val="11202B"/>
+                </a:solidFill>
+                <a:latin typeface="Malgun Gothic"/>
+                <a:ea typeface="Malgun Gothic"/>
+                <a:cs typeface="Malgun Gothic"/>
+              </a:rPr>
               <a:t>"우성 유전자가 열성 유전자보다 강하다"는 설명은 부정확하다. 우성과 열성은 유전자의 성질이 아니라 </a:t>
             </a:r>
             <a:r>
@@ -8054,6 +8229,57 @@
                 <a:ea typeface="Malgun Gothic"/>
                 <a:cs typeface="Malgun Gothic"/>
               </a:rPr>
+              <a:t>멘델의 두 번째 법칙은 서로 다른 형질이 독립적으로 전달된다는 것이었다. 그런데 멘델이 고른 일곱 형질이 마침 서로 다른 염색체에 있었기에 그 결과가 나왔다. </a:t>
+            </a:r>
+            <a:r>
+              <a:rPr sz="1400" b="1" i="0">
+                <a:solidFill>
+                  <a:srgbClr val="11202B"/>
+                </a:solidFill>
+                <a:latin typeface="Malgun Gothic"/>
+                <a:ea typeface="Malgun Gothic"/>
+                <a:cs typeface="Malgun Gothic"/>
+              </a:rPr>
+              <a:t>같은 염색체에 있으면 어떻게 되는가.</a:t>
+            </a:r>
+            <a:r>
+              <a:rPr sz="1400" b="0" i="0">
+                <a:solidFill>
+                  <a:srgbClr val="11202B"/>
+                </a:solidFill>
+                <a:latin typeface="Malgun Gothic"/>
+                <a:ea typeface="Malgun Gothic"/>
+                <a:cs typeface="Malgun Gothic"/>
+              </a:rPr>
+              <a:t> 이 절은 법칙이 깨지는 조건과, 그 깨짐이 오히려 유전자의 위치를 알아내는 도구가 된 과정을 다룬다.</a:t>
+            </a:r>
+          </a:p>
+          <a:p>
+            <a:pPr>
+              <a:spcAft>
+                <a:spcPts val="900"/>
+              </a:spcAft>
+            </a:pPr>
+            <a:r>
+              <a:rPr sz="1400" b="1" i="0">
+                <a:solidFill>
+                  <a:srgbClr val="F2B705"/>
+                </a:solidFill>
+                <a:latin typeface="Malgun Gothic"/>
+                <a:ea typeface="Malgun Gothic"/>
+                <a:cs typeface="Malgun Gothic"/>
+              </a:rPr>
+              <a:t>•  </a:t>
+            </a:r>
+            <a:r>
+              <a:rPr sz="1400" b="0" i="0">
+                <a:solidFill>
+                  <a:srgbClr val="11202B"/>
+                </a:solidFill>
+                <a:latin typeface="Malgun Gothic"/>
+                <a:ea typeface="Malgun Gothic"/>
+                <a:cs typeface="Malgun Gothic"/>
+              </a:rPr>
               <a:t>같은 염색체에 있는 유전자들은 함께 전달되는 경향이 있다. 이를 </a:t>
             </a:r>
             <a:r>
@@ -8561,6 +8787,57 @@
               <a:t>•  </a:t>
             </a:r>
             <a:r>
+              <a:rPr sz="1400" b="0" i="0">
+                <a:solidFill>
+                  <a:srgbClr val="11202B"/>
+                </a:solidFill>
+                <a:latin typeface="Malgun Gothic"/>
+                <a:ea typeface="Malgun Gothic"/>
+                <a:cs typeface="Malgun Gothic"/>
+              </a:rPr>
+              <a:t>지금까지는 두 벌이 똑같이 있는 상염색체를 전제로 했다. 그런데 성염색체는 그렇지 않다. 남성은 X를 한 벌만 가지고, 여성은 두 벌을 가진다. </a:t>
+            </a:r>
+            <a:r>
+              <a:rPr sz="1400" b="1" i="0">
+                <a:solidFill>
+                  <a:srgbClr val="11202B"/>
+                </a:solidFill>
+                <a:latin typeface="Malgun Gothic"/>
+                <a:ea typeface="Malgun Gothic"/>
+                <a:cs typeface="Malgun Gothic"/>
+              </a:rPr>
+              <a:t>벌 수가 다르면 앞에서 세운 규칙이 그대로 적용되지 않는다.</a:t>
+            </a:r>
+            <a:r>
+              <a:rPr sz="1400" b="0" i="0">
+                <a:solidFill>
+                  <a:srgbClr val="11202B"/>
+                </a:solidFill>
+                <a:latin typeface="Malgun Gothic"/>
+                <a:ea typeface="Malgun Gothic"/>
+                <a:cs typeface="Malgun Gothic"/>
+              </a:rPr>
+              <a:t> 이 절은 그 차이가 만드는 고유한 유전 양식을 다룬다.</a:t>
+            </a:r>
+          </a:p>
+          <a:p>
+            <a:pPr>
+              <a:spcAft>
+                <a:spcPts val="900"/>
+              </a:spcAft>
+            </a:pPr>
+            <a:r>
+              <a:rPr sz="1400" b="1" i="0">
+                <a:solidFill>
+                  <a:srgbClr val="F2B705"/>
+                </a:solidFill>
+                <a:latin typeface="Malgun Gothic"/>
+                <a:ea typeface="Malgun Gothic"/>
+                <a:cs typeface="Malgun Gothic"/>
+              </a:rPr>
+              <a:t>•  </a:t>
+            </a:r>
+            <a:r>
               <a:rPr sz="1400" b="1" i="0">
                 <a:solidFill>
                   <a:srgbClr val="11202B"/>
@@ -10151,6 +10428,57 @@
                 <a:ea typeface="Malgun Gothic"/>
                 <a:cs typeface="Malgun Gothic"/>
               </a:rPr>
+              <a:t>앞 절까지로 멘델의 규칙과 그 예외 둘(연관, 성 연관)을 보았다. 그런데 임상에서 마주치는 가계도 가운데에는 이 틀로도 설명되지 않는 것이 있다. 이 절은 그런 경우를 네 가지로 나누며, </a:t>
+            </a:r>
+            <a:r>
+              <a:rPr sz="1400" b="1" i="0">
+                <a:solidFill>
+                  <a:srgbClr val="11202B"/>
+                </a:solidFill>
+                <a:latin typeface="Malgun Gothic"/>
+                <a:ea typeface="Malgun Gothic"/>
+                <a:cs typeface="Malgun Gothic"/>
+              </a:rPr>
+              <a:t>각각이 규칙의 어느 전제를 깨는지</a:t>
+            </a:r>
+            <a:r>
+              <a:rPr sz="1400" b="0" i="0">
+                <a:solidFill>
+                  <a:srgbClr val="11202B"/>
+                </a:solidFill>
+                <a:latin typeface="Malgun Gothic"/>
+                <a:ea typeface="Malgun Gothic"/>
+                <a:cs typeface="Malgun Gothic"/>
+              </a:rPr>
+              <a:t>를 함께 짚는다.</a:t>
+            </a:r>
+          </a:p>
+          <a:p>
+            <a:pPr>
+              <a:spcAft>
+                <a:spcPts val="900"/>
+              </a:spcAft>
+            </a:pPr>
+            <a:r>
+              <a:rPr sz="1400" b="1" i="0">
+                <a:solidFill>
+                  <a:srgbClr val="F2B705"/>
+                </a:solidFill>
+                <a:latin typeface="Malgun Gothic"/>
+                <a:ea typeface="Malgun Gothic"/>
+                <a:cs typeface="Malgun Gothic"/>
+              </a:rPr>
+              <a:t>•  </a:t>
+            </a:r>
+            <a:r>
+              <a:rPr sz="1400" b="0" i="0">
+                <a:solidFill>
+                  <a:srgbClr val="11202B"/>
+                </a:solidFill>
+                <a:latin typeface="Malgun Gothic"/>
+                <a:ea typeface="Malgun Gothic"/>
+                <a:cs typeface="Malgun Gothic"/>
+              </a:rPr>
               <a:t>가계도가 멘델의 규칙을 따르지 않는 경우가 있다. 네 가지를 구분한다.</a:t>
             </a:r>
           </a:p>
@@ -11243,6 +11571,57 @@
                 <a:ea typeface="Malgun Gothic"/>
                 <a:cs typeface="Malgun Gothic"/>
               </a:rPr>
+              <a:t>여기까지가 세 번째 질문, 즉 전해지는 규칙이었다. 이제 네 번째 질문으로 넘어간다. </a:t>
+            </a:r>
+            <a:r>
+              <a:rPr sz="1400" b="1" i="0">
+                <a:solidFill>
+                  <a:srgbClr val="11202B"/>
+                </a:solidFill>
+                <a:latin typeface="Malgun Gothic"/>
+                <a:ea typeface="Malgun Gothic"/>
+                <a:cs typeface="Malgun Gothic"/>
+              </a:rPr>
+              <a:t>전해지는 것이 달라지는 일은 어떻게 일어나는가.</a:t>
+            </a:r>
+            <a:r>
+              <a:rPr sz="1400" b="0" i="0">
+                <a:solidFill>
+                  <a:srgbClr val="11202B"/>
+                </a:solidFill>
+                <a:latin typeface="Malgun Gothic"/>
+                <a:ea typeface="Malgun Gothic"/>
+                <a:cs typeface="Malgun Gothic"/>
+              </a:rPr>
+              <a:t> 변이가 없으면 모두가 똑같을 것이고 진화도 질병도 없다. 변이의 종류를 보기 전에 그것이 어디서 오는지부터 정한다.</a:t>
+            </a:r>
+          </a:p>
+          <a:p>
+            <a:pPr>
+              <a:spcAft>
+                <a:spcPts val="900"/>
+              </a:spcAft>
+            </a:pPr>
+            <a:r>
+              <a:rPr sz="1400" b="1" i="0">
+                <a:solidFill>
+                  <a:srgbClr val="F2B705"/>
+                </a:solidFill>
+                <a:latin typeface="Malgun Gothic"/>
+                <a:ea typeface="Malgun Gothic"/>
+                <a:cs typeface="Malgun Gothic"/>
+              </a:rPr>
+              <a:t>•  </a:t>
+            </a:r>
+            <a:r>
+              <a:rPr sz="1400" b="0" i="0">
+                <a:solidFill>
+                  <a:srgbClr val="11202B"/>
+                </a:solidFill>
+                <a:latin typeface="Malgun Gothic"/>
+                <a:ea typeface="Malgun Gothic"/>
+                <a:cs typeface="Malgun Gothic"/>
+              </a:rPr>
               <a:t>변이의 종류를 보기 전에 변이가 </a:t>
             </a:r>
             <a:r>
@@ -14251,6 +14630,57 @@
                 <a:ea typeface="Malgun Gothic"/>
                 <a:cs typeface="Malgun Gothic"/>
               </a:rPr>
+              <a:t>앞 절에서 유전학이 답해야 할 질문을 넷으로 나누었다. 그 첫 번째가 "무엇이 전해지는가"다. 지금은 당연해 보이지만 20세기 중반까지도 답이 정해져 있지 않았고, </a:t>
+            </a:r>
+            <a:r>
+              <a:rPr sz="1400" b="1" i="0">
+                <a:solidFill>
+                  <a:srgbClr val="11202B"/>
+                </a:solidFill>
+                <a:latin typeface="Malgun Gothic"/>
+                <a:ea typeface="Malgun Gothic"/>
+                <a:cs typeface="Malgun Gothic"/>
+              </a:rPr>
+              <a:t>답을 가린 것은 논증이 아니라 실험이었다.</a:t>
+            </a:r>
+            <a:r>
+              <a:rPr sz="1400" b="0" i="0">
+                <a:solidFill>
+                  <a:srgbClr val="11202B"/>
+                </a:solidFill>
+                <a:latin typeface="Malgun Gothic"/>
+                <a:ea typeface="Malgun Gothic"/>
+                <a:cs typeface="Malgun Gothic"/>
+              </a:rPr>
+              <a:t> 그 실험들이 어떻게 설계되었는지를 보는 것이 이 절의 목적이다.</a:t>
+            </a:r>
+          </a:p>
+          <a:p>
+            <a:pPr>
+              <a:spcAft>
+                <a:spcPts val="900"/>
+              </a:spcAft>
+            </a:pPr>
+            <a:r>
+              <a:rPr sz="1400" b="1" i="0">
+                <a:solidFill>
+                  <a:srgbClr val="F2B705"/>
+                </a:solidFill>
+                <a:latin typeface="Malgun Gothic"/>
+                <a:ea typeface="Malgun Gothic"/>
+                <a:cs typeface="Malgun Gothic"/>
+              </a:rPr>
+              <a:t>•  </a:t>
+            </a:r>
+            <a:r>
+              <a:rPr sz="1400" b="0" i="0">
+                <a:solidFill>
+                  <a:srgbClr val="11202B"/>
+                </a:solidFill>
+                <a:latin typeface="Malgun Gothic"/>
+                <a:ea typeface="Malgun Gothic"/>
+                <a:cs typeface="Malgun Gothic"/>
+              </a:rPr>
               <a:t>20세기 초까지 유전물질의 후보는 단백질이 유력했다. 단백질은 20종의 아미노산으로 이루어져 다양하고, DNA는 네 종류의 염기뿐이라 단조로워 보였기 때문이다. 결론이 뒤집히는 데 세 실험이 결정적이었다.</a:t>
             </a:r>
           </a:p>
@@ -15160,6 +15590,57 @@
             <a:spAutoFit/>
           </a:bodyPr>
           <a:lstStyle/>
+          <a:p>
+            <a:pPr>
+              <a:spcAft>
+                <a:spcPts val="900"/>
+              </a:spcAft>
+            </a:pPr>
+            <a:r>
+              <a:rPr sz="1400" b="1" i="0">
+                <a:solidFill>
+                  <a:srgbClr val="F2B705"/>
+                </a:solidFill>
+                <a:latin typeface="Malgun Gothic"/>
+                <a:ea typeface="Malgun Gothic"/>
+                <a:cs typeface="Malgun Gothic"/>
+              </a:rPr>
+              <a:t>•  </a:t>
+            </a:r>
+            <a:r>
+              <a:rPr sz="1400" b="0" i="0">
+                <a:solidFill>
+                  <a:srgbClr val="11202B"/>
+                </a:solidFill>
+                <a:latin typeface="Malgun Gothic"/>
+                <a:ea typeface="Malgun Gothic"/>
+                <a:cs typeface="Malgun Gothic"/>
+              </a:rPr>
+              <a:t>앞 절에서 전해지는 것이 DNA라는 데까지 왔다. 그런데 DNA는 화학물질일 뿐이고, 우리가 보는 것은 눈 색깔이나 혈액형 같은 형질이다. </a:t>
+            </a:r>
+            <a:r>
+              <a:rPr sz="1400" b="1" i="0">
+                <a:solidFill>
+                  <a:srgbClr val="11202B"/>
+                </a:solidFill>
+                <a:latin typeface="Malgun Gothic"/>
+                <a:ea typeface="Malgun Gothic"/>
+                <a:cs typeface="Malgun Gothic"/>
+              </a:rPr>
+              <a:t>그 사이를 무엇이 잇는가.</a:t>
+            </a:r>
+            <a:r>
+              <a:rPr sz="1400" b="0" i="0">
+                <a:solidFill>
+                  <a:srgbClr val="11202B"/>
+                </a:solidFill>
+                <a:latin typeface="Malgun Gothic"/>
+                <a:ea typeface="Malgun Gothic"/>
+                <a:cs typeface="Malgun Gothic"/>
+              </a:rPr>
+              <a:t> 이 절은 유전자와 형질 사이에 단백질이라는 중간 단계가 있다는 것, 그리고 그 사슬이 한 칸씩 끊어질 수 있다는 것을 다룬다.</a:t>
+            </a:r>
+          </a:p>
           <a:p>
             <a:pPr>
               <a:spcAft>
